--- a/reports/BRANCH_FLORES_PERFORMANCE_SUMMARY_20260827_INARA.pptx
+++ b/reports/BRANCH_FLORES_PERFORMANCE_SUMMARY_20260827_INARA.pptx
@@ -12528,7 +12528,7 @@
                 </a:solidFill>
                 <a:latin typeface="Arial"/>
               </a:rPr>
-              <a:t>-16,1%</a:t>
+              <a:t>-18,8%</a:t>
             </a:r>
           </a:p>
         </p:txBody>
@@ -12563,7 +12563,7 @@
                 </a:solidFill>
                 <a:latin typeface="Arial"/>
               </a:rPr>
-              <a:t>MTD-1: 62   Δ -10</a:t>
+              <a:t>MTD-1: 64   Δ -12</a:t>
             </a:r>
           </a:p>
         </p:txBody>
@@ -12680,7 +12680,7 @@
                 </a:solidFill>
                 <a:latin typeface="Arial"/>
               </a:rPr>
-              <a:t>1.673</a:t>
+              <a:t>1.814</a:t>
             </a:r>
           </a:p>
         </p:txBody>
@@ -12715,7 +12715,7 @@
                 </a:solidFill>
                 <a:latin typeface="Arial"/>
               </a:rPr>
-              <a:t>-21,9%</a:t>
+              <a:t>-18,9%</a:t>
             </a:r>
           </a:p>
         </p:txBody>
@@ -12750,7 +12750,7 @@
                 </a:solidFill>
                 <a:latin typeface="Arial"/>
               </a:rPr>
-              <a:t>MTD-1: 2.142   Δ -469</a:t>
+              <a:t>MTD-1: 2.238   Δ -424</a:t>
             </a:r>
           </a:p>
         </p:txBody>
@@ -13886,7 +13886,7 @@
                           </a:solidFill>
                           <a:latin typeface="Arial"/>
                         </a:rPr>
-                        <a:t>33</a:t>
+                        <a:t>35</a:t>
                       </a:r>
                     </a:p>
                   </a:txBody>
@@ -13976,158 +13976,158 @@
                       <a:r>
                         <a:rPr sz="1050" b="0">
                           <a:solidFill>
+                            <a:srgbClr val="687386"/>
+                          </a:solidFill>
+                          <a:latin typeface="Arial"/>
+                        </a:rPr>
+                        <a:t>0,0%</a:t>
+                      </a:r>
+                    </a:p>
+                  </a:txBody>
+                  <a:tcPr marL="27432" marR="27432" marT="0" marB="0">
+                    <a:solidFill>
+                      <a:srgbClr val="E9EDF2"/>
+                    </a:solidFill>
+                    <a:lnL w="9000" cap="flat" cmpd="sng" algn="ctr">
+                      <a:solidFill>
+                        <a:srgbClr val="D8DEE7"/>
+                      </a:solidFill>
+                      <a:prstDash val="solid"/>
+                    </a:lnL>
+                    <a:lnR w="9000" cap="flat" cmpd="sng" algn="ctr">
+                      <a:solidFill>
+                        <a:srgbClr val="D8DEE7"/>
+                      </a:solidFill>
+                      <a:prstDash val="solid"/>
+                    </a:lnR>
+                    <a:lnT w="9000" cap="flat" cmpd="sng" algn="ctr">
+                      <a:solidFill>
+                        <a:srgbClr val="D8DEE7"/>
+                      </a:solidFill>
+                      <a:prstDash val="solid"/>
+                    </a:lnT>
+                    <a:lnB w="9000" cap="flat" cmpd="sng" algn="ctr">
+                      <a:solidFill>
+                        <a:srgbClr val="D8DEE7"/>
+                      </a:solidFill>
+                      <a:prstDash val="solid"/>
+                    </a:lnB>
+                  </a:tcPr>
+                </a:tc>
+                <a:tc>
+                  <a:txBody>
+                    <a:bodyPr lIns="27432" rIns="27432" tIns="0" bIns="0" anchor="ctr"/>
+                    <a:lstStyle/>
+                    <a:p>
+                      <a:pPr algn="ctr"/>
+                      <a:r>
+                        <a:rPr sz="1050" b="0">
+                          <a:solidFill>
+                            <a:srgbClr val="20252B"/>
+                          </a:solidFill>
+                          <a:latin typeface="Arial"/>
+                        </a:rPr>
+                        <a:t>1.178</a:t>
+                      </a:r>
+                    </a:p>
+                  </a:txBody>
+                  <a:tcPr marL="27432" marR="27432" marT="0" marB="0">
+                    <a:solidFill>
+                      <a:srgbClr val="FFFFFF"/>
+                    </a:solidFill>
+                    <a:lnL w="9000" cap="flat" cmpd="sng" algn="ctr">
+                      <a:solidFill>
+                        <a:srgbClr val="D8DEE7"/>
+                      </a:solidFill>
+                      <a:prstDash val="solid"/>
+                    </a:lnL>
+                    <a:lnR w="9000" cap="flat" cmpd="sng" algn="ctr">
+                      <a:solidFill>
+                        <a:srgbClr val="D8DEE7"/>
+                      </a:solidFill>
+                      <a:prstDash val="solid"/>
+                    </a:lnR>
+                    <a:lnT w="9000" cap="flat" cmpd="sng" algn="ctr">
+                      <a:solidFill>
+                        <a:srgbClr val="D8DEE7"/>
+                      </a:solidFill>
+                      <a:prstDash val="solid"/>
+                    </a:lnT>
+                    <a:lnB w="9000" cap="flat" cmpd="sng" algn="ctr">
+                      <a:solidFill>
+                        <a:srgbClr val="D8DEE7"/>
+                      </a:solidFill>
+                      <a:prstDash val="solid"/>
+                    </a:lnB>
+                  </a:tcPr>
+                </a:tc>
+                <a:tc>
+                  <a:txBody>
+                    <a:bodyPr lIns="27432" rIns="27432" tIns="0" bIns="0" anchor="ctr"/>
+                    <a:lstStyle/>
+                    <a:p>
+                      <a:pPr algn="ctr"/>
+                      <a:r>
+                        <a:rPr sz="1050" b="1">
+                          <a:solidFill>
+                            <a:srgbClr val="20252B"/>
+                          </a:solidFill>
+                          <a:latin typeface="Arial"/>
+                        </a:rPr>
+                        <a:t>1.201</a:t>
+                      </a:r>
+                    </a:p>
+                  </a:txBody>
+                  <a:tcPr marL="27432" marR="27432" marT="0" marB="0">
+                    <a:solidFill>
+                      <a:srgbClr val="FFFFFF"/>
+                    </a:solidFill>
+                    <a:lnL w="9000" cap="flat" cmpd="sng" algn="ctr">
+                      <a:solidFill>
+                        <a:srgbClr val="D8DEE7"/>
+                      </a:solidFill>
+                      <a:prstDash val="solid"/>
+                    </a:lnL>
+                    <a:lnR w="9000" cap="flat" cmpd="sng" algn="ctr">
+                      <a:solidFill>
+                        <a:srgbClr val="D8DEE7"/>
+                      </a:solidFill>
+                      <a:prstDash val="solid"/>
+                    </a:lnR>
+                    <a:lnT w="9000" cap="flat" cmpd="sng" algn="ctr">
+                      <a:solidFill>
+                        <a:srgbClr val="D8DEE7"/>
+                      </a:solidFill>
+                      <a:prstDash val="solid"/>
+                    </a:lnT>
+                    <a:lnB w="9000" cap="flat" cmpd="sng" algn="ctr">
+                      <a:solidFill>
+                        <a:srgbClr val="D8DEE7"/>
+                      </a:solidFill>
+                      <a:prstDash val="solid"/>
+                    </a:lnB>
+                  </a:tcPr>
+                </a:tc>
+                <a:tc>
+                  <a:txBody>
+                    <a:bodyPr lIns="27432" rIns="27432" tIns="0" bIns="0" anchor="ctr"/>
+                    <a:lstStyle/>
+                    <a:p>
+                      <a:pPr algn="ctr"/>
+                      <a:r>
+                        <a:rPr sz="1050" b="0">
+                          <a:solidFill>
                             <a:srgbClr val="137D3F"/>
                           </a:solidFill>
                           <a:latin typeface="Arial"/>
                         </a:rPr>
-                        <a:t>+6,1%</a:t>
+                        <a:t>+2,0%</a:t>
                       </a:r>
                     </a:p>
                   </a:txBody>
                   <a:tcPr marL="27432" marR="27432" marT="0" marB="0">
                     <a:solidFill>
                       <a:srgbClr val="E5F4EA"/>
-                    </a:solidFill>
-                    <a:lnL w="9000" cap="flat" cmpd="sng" algn="ctr">
-                      <a:solidFill>
-                        <a:srgbClr val="D8DEE7"/>
-                      </a:solidFill>
-                      <a:prstDash val="solid"/>
-                    </a:lnL>
-                    <a:lnR w="9000" cap="flat" cmpd="sng" algn="ctr">
-                      <a:solidFill>
-                        <a:srgbClr val="D8DEE7"/>
-                      </a:solidFill>
-                      <a:prstDash val="solid"/>
-                    </a:lnR>
-                    <a:lnT w="9000" cap="flat" cmpd="sng" algn="ctr">
-                      <a:solidFill>
-                        <a:srgbClr val="D8DEE7"/>
-                      </a:solidFill>
-                      <a:prstDash val="solid"/>
-                    </a:lnT>
-                    <a:lnB w="9000" cap="flat" cmpd="sng" algn="ctr">
-                      <a:solidFill>
-                        <a:srgbClr val="D8DEE7"/>
-                      </a:solidFill>
-                      <a:prstDash val="solid"/>
-                    </a:lnB>
-                  </a:tcPr>
-                </a:tc>
-                <a:tc>
-                  <a:txBody>
-                    <a:bodyPr lIns="27432" rIns="27432" tIns="0" bIns="0" anchor="ctr"/>
-                    <a:lstStyle/>
-                    <a:p>
-                      <a:pPr algn="ctr"/>
-                      <a:r>
-                        <a:rPr sz="1050" b="0">
-                          <a:solidFill>
-                            <a:srgbClr val="20252B"/>
-                          </a:solidFill>
-                          <a:latin typeface="Arial"/>
-                        </a:rPr>
-                        <a:t>1.139</a:t>
-                      </a:r>
-                    </a:p>
-                  </a:txBody>
-                  <a:tcPr marL="27432" marR="27432" marT="0" marB="0">
-                    <a:solidFill>
-                      <a:srgbClr val="FFFFFF"/>
-                    </a:solidFill>
-                    <a:lnL w="9000" cap="flat" cmpd="sng" algn="ctr">
-                      <a:solidFill>
-                        <a:srgbClr val="D8DEE7"/>
-                      </a:solidFill>
-                      <a:prstDash val="solid"/>
-                    </a:lnL>
-                    <a:lnR w="9000" cap="flat" cmpd="sng" algn="ctr">
-                      <a:solidFill>
-                        <a:srgbClr val="D8DEE7"/>
-                      </a:solidFill>
-                      <a:prstDash val="solid"/>
-                    </a:lnR>
-                    <a:lnT w="9000" cap="flat" cmpd="sng" algn="ctr">
-                      <a:solidFill>
-                        <a:srgbClr val="D8DEE7"/>
-                      </a:solidFill>
-                      <a:prstDash val="solid"/>
-                    </a:lnT>
-                    <a:lnB w="9000" cap="flat" cmpd="sng" algn="ctr">
-                      <a:solidFill>
-                        <a:srgbClr val="D8DEE7"/>
-                      </a:solidFill>
-                      <a:prstDash val="solid"/>
-                    </a:lnB>
-                  </a:tcPr>
-                </a:tc>
-                <a:tc>
-                  <a:txBody>
-                    <a:bodyPr lIns="27432" rIns="27432" tIns="0" bIns="0" anchor="ctr"/>
-                    <a:lstStyle/>
-                    <a:p>
-                      <a:pPr algn="ctr"/>
-                      <a:r>
-                        <a:rPr sz="1050" b="1">
-                          <a:solidFill>
-                            <a:srgbClr val="20252B"/>
-                          </a:solidFill>
-                          <a:latin typeface="Arial"/>
-                        </a:rPr>
-                        <a:t>1.108</a:t>
-                      </a:r>
-                    </a:p>
-                  </a:txBody>
-                  <a:tcPr marL="27432" marR="27432" marT="0" marB="0">
-                    <a:solidFill>
-                      <a:srgbClr val="FFFFFF"/>
-                    </a:solidFill>
-                    <a:lnL w="9000" cap="flat" cmpd="sng" algn="ctr">
-                      <a:solidFill>
-                        <a:srgbClr val="D8DEE7"/>
-                      </a:solidFill>
-                      <a:prstDash val="solid"/>
-                    </a:lnL>
-                    <a:lnR w="9000" cap="flat" cmpd="sng" algn="ctr">
-                      <a:solidFill>
-                        <a:srgbClr val="D8DEE7"/>
-                      </a:solidFill>
-                      <a:prstDash val="solid"/>
-                    </a:lnR>
-                    <a:lnT w="9000" cap="flat" cmpd="sng" algn="ctr">
-                      <a:solidFill>
-                        <a:srgbClr val="D8DEE7"/>
-                      </a:solidFill>
-                      <a:prstDash val="solid"/>
-                    </a:lnT>
-                    <a:lnB w="9000" cap="flat" cmpd="sng" algn="ctr">
-                      <a:solidFill>
-                        <a:srgbClr val="D8DEE7"/>
-                      </a:solidFill>
-                      <a:prstDash val="solid"/>
-                    </a:lnB>
-                  </a:tcPr>
-                </a:tc>
-                <a:tc>
-                  <a:txBody>
-                    <a:bodyPr lIns="27432" rIns="27432" tIns="0" bIns="0" anchor="ctr"/>
-                    <a:lstStyle/>
-                    <a:p>
-                      <a:pPr algn="ctr"/>
-                      <a:r>
-                        <a:rPr sz="1050" b="0">
-                          <a:solidFill>
-                            <a:srgbClr val="D73527"/>
-                          </a:solidFill>
-                          <a:latin typeface="Arial"/>
-                        </a:rPr>
-                        <a:t>-2,7%</a:t>
-                      </a:r>
-                    </a:p>
-                  </a:txBody>
-                  <a:tcPr marL="27432" marR="27432" marT="0" marB="0">
-                    <a:solidFill>
-                      <a:srgbClr val="FBE9E7"/>
                     </a:solidFill>
                     <a:lnL w="9000" cap="flat" cmpd="sng" algn="ctr">
                       <a:solidFill>
@@ -14687,7 +14687,7 @@
                           </a:solidFill>
                           <a:latin typeface="Arial"/>
                         </a:rPr>
-                        <a:t>1.003</a:t>
+                        <a:t>1.060</a:t>
                       </a:r>
                     </a:p>
                   </a:txBody>
@@ -14734,7 +14734,7 @@
                           </a:solidFill>
                           <a:latin typeface="Arial"/>
                         </a:rPr>
-                        <a:t>565</a:t>
+                        <a:t>613</a:t>
                       </a:r>
                     </a:p>
                   </a:txBody>
@@ -14781,7 +14781,7 @@
                           </a:solidFill>
                           <a:latin typeface="Arial"/>
                         </a:rPr>
-                        <a:t>-43,7%</a:t>
+                        <a:t>-42,2%</a:t>
                       </a:r>
                     </a:p>
                   </a:txBody>
@@ -22871,7 +22871,7 @@
                 </a:solidFill>
                 <a:latin typeface="Arial"/>
               </a:rPr>
-              <a:t>ODP dikunjungi  78 (31,5%)</a:t>
+              <a:t>ODP dikunjungi  82 (33,1%)</a:t>
             </a:r>
           </a:p>
         </p:txBody>
@@ -22941,7 +22941,7 @@
                 </a:solidFill>
                 <a:latin typeface="Arial"/>
               </a:rPr>
-              <a:t>117</a:t>
+              <a:t>125</a:t>
             </a:r>
           </a:p>
         </p:txBody>
@@ -23093,7 +23093,7 @@
                 </a:solidFill>
                 <a:latin typeface="Arial"/>
               </a:rPr>
-              <a:t>ODP dikunjungi  55 (67,9%)</a:t>
+              <a:t>ODP dikunjungi  57 (70,4%)</a:t>
             </a:r>
           </a:p>
         </p:txBody>
@@ -23163,7 +23163,7 @@
                 </a:solidFill>
                 <a:latin typeface="Arial"/>
               </a:rPr>
-              <a:t>97</a:t>
+              <a:t>104</a:t>
             </a:r>
           </a:p>
         </p:txBody>
